--- a/slides for class/my slides/About JavaScript - new template.pptx
+++ b/slides for class/my slides/About JavaScript - new template.pptx
@@ -27,6 +27,12 @@
     <p:sldId id="275" r:id="rId21"/>
     <p:sldId id="276" r:id="rId22"/>
     <p:sldId id="277" r:id="rId23"/>
+    <p:sldId id="278" r:id="rId24"/>
+    <p:sldId id="279" r:id="rId25"/>
+    <p:sldId id="280" r:id="rId26"/>
+    <p:sldId id="281" r:id="rId27"/>
+    <p:sldId id="282" r:id="rId28"/>
+    <p:sldId id="283" r:id="rId29"/>
   </p:sldIdLst>
   <p:sldSz cx="12192000" cy="6858000"/>
   <p:notesSz cx="6858000" cy="9144000"/>
@@ -314,7 +320,7 @@
           <a:p>
             <a:fld id="{48A87A34-81AB-432B-8DAE-1953F412C126}" type="datetimeFigureOut">
               <a:rPr lang="en-US" dirty="0"/>
-              <a:t>7/13/25</a:t>
+              <a:t>8/7/25</a:t>
             </a:fld>
             <a:endParaRPr lang="en-US" dirty="0"/>
           </a:p>
@@ -576,7 +582,7 @@
           <a:p>
             <a:fld id="{48A87A34-81AB-432B-8DAE-1953F412C126}" type="datetimeFigureOut">
               <a:rPr lang="en-US" dirty="0"/>
-              <a:t>7/13/25</a:t>
+              <a:t>8/7/25</a:t>
             </a:fld>
             <a:endParaRPr lang="en-US" dirty="0"/>
           </a:p>
@@ -803,7 +809,7 @@
             <a:fld id="{48A87A34-81AB-432B-8DAE-1953F412C126}" type="datetimeFigureOut">
               <a:rPr lang="en-US" dirty="0"/>
               <a:pPr/>
-              <a:t>7/13/25</a:t>
+              <a:t>8/7/25</a:t>
             </a:fld>
             <a:endParaRPr lang="en-US" dirty="0"/>
           </a:p>
@@ -1109,7 +1115,7 @@
             <a:fld id="{48A87A34-81AB-432B-8DAE-1953F412C126}" type="datetimeFigureOut">
               <a:rPr lang="en-US" dirty="0"/>
               <a:pPr/>
-              <a:t>7/13/25</a:t>
+              <a:t>8/7/25</a:t>
             </a:fld>
             <a:endParaRPr lang="en-US" dirty="0"/>
           </a:p>
@@ -1578,7 +1584,7 @@
             <a:fld id="{48A87A34-81AB-432B-8DAE-1953F412C126}" type="datetimeFigureOut">
               <a:rPr lang="en-US" dirty="0"/>
               <a:pPr/>
-              <a:t>7/13/25</a:t>
+              <a:t>8/7/25</a:t>
             </a:fld>
             <a:endParaRPr lang="en-US" dirty="0"/>
           </a:p>
@@ -2120,7 +2126,7 @@
           <a:p>
             <a:fld id="{48A87A34-81AB-432B-8DAE-1953F412C126}" type="datetimeFigureOut">
               <a:rPr lang="en-US" dirty="0"/>
-              <a:t>7/13/25</a:t>
+              <a:t>8/7/25</a:t>
             </a:fld>
             <a:endParaRPr lang="en-US" dirty="0"/>
           </a:p>
@@ -2889,7 +2895,7 @@
           <a:p>
             <a:fld id="{48A87A34-81AB-432B-8DAE-1953F412C126}" type="datetimeFigureOut">
               <a:rPr lang="en-US" dirty="0"/>
-              <a:t>7/13/25</a:t>
+              <a:t>8/7/25</a:t>
             </a:fld>
             <a:endParaRPr lang="en-US" dirty="0"/>
           </a:p>
@@ -3059,7 +3065,7 @@
           <a:p>
             <a:fld id="{48A87A34-81AB-432B-8DAE-1953F412C126}" type="datetimeFigureOut">
               <a:rPr lang="en-US" dirty="0"/>
-              <a:t>7/13/25</a:t>
+              <a:t>8/7/25</a:t>
             </a:fld>
             <a:endParaRPr lang="en-US" dirty="0"/>
           </a:p>
@@ -3278,7 +3284,7 @@
             <a:fld id="{48A87A34-81AB-432B-8DAE-1953F412C126}" type="datetimeFigureOut">
               <a:rPr lang="en-US" dirty="0"/>
               <a:pPr/>
-              <a:t>7/13/25</a:t>
+              <a:t>8/7/25</a:t>
             </a:fld>
             <a:endParaRPr lang="en-US" dirty="0"/>
           </a:p>
@@ -3453,7 +3459,7 @@
           <a:p>
             <a:fld id="{48A87A34-81AB-432B-8DAE-1953F412C126}" type="datetimeFigureOut">
               <a:rPr lang="en-US" dirty="0"/>
-              <a:t>7/13/25</a:t>
+              <a:t>8/7/25</a:t>
             </a:fld>
             <a:endParaRPr lang="en-US" dirty="0"/>
           </a:p>
@@ -3738,7 +3744,7 @@
             <a:fld id="{48A87A34-81AB-432B-8DAE-1953F412C126}" type="datetimeFigureOut">
               <a:rPr lang="en-US" dirty="0"/>
               <a:pPr/>
-              <a:t>7/13/25</a:t>
+              <a:t>8/7/25</a:t>
             </a:fld>
             <a:endParaRPr lang="en-US" dirty="0"/>
           </a:p>
@@ -3975,7 +3981,7 @@
           <a:p>
             <a:fld id="{48A87A34-81AB-432B-8DAE-1953F412C126}" type="datetimeFigureOut">
               <a:rPr lang="en-US" dirty="0"/>
-              <a:t>7/13/25</a:t>
+              <a:t>8/7/25</a:t>
             </a:fld>
             <a:endParaRPr lang="en-US" dirty="0"/>
           </a:p>
@@ -4349,7 +4355,7 @@
           <a:p>
             <a:fld id="{48A87A34-81AB-432B-8DAE-1953F412C126}" type="datetimeFigureOut">
               <a:rPr lang="en-US" dirty="0"/>
-              <a:t>7/13/25</a:t>
+              <a:t>8/7/25</a:t>
             </a:fld>
             <a:endParaRPr lang="en-US" dirty="0"/>
           </a:p>
@@ -4462,7 +4468,7 @@
           <a:p>
             <a:fld id="{48A87A34-81AB-432B-8DAE-1953F412C126}" type="datetimeFigureOut">
               <a:rPr lang="en-US" dirty="0"/>
-              <a:t>7/13/25</a:t>
+              <a:t>8/7/25</a:t>
             </a:fld>
             <a:endParaRPr lang="en-US" dirty="0"/>
           </a:p>
@@ -4552,7 +4558,7 @@
           <a:p>
             <a:fld id="{48A87A34-81AB-432B-8DAE-1953F412C126}" type="datetimeFigureOut">
               <a:rPr lang="en-US" dirty="0"/>
-              <a:t>7/13/25</a:t>
+              <a:t>8/7/25</a:t>
             </a:fld>
             <a:endParaRPr lang="en-US" dirty="0"/>
           </a:p>
@@ -4796,7 +4802,7 @@
           <a:p>
             <a:fld id="{48A87A34-81AB-432B-8DAE-1953F412C126}" type="datetimeFigureOut">
               <a:rPr lang="en-US" dirty="0"/>
-              <a:t>7/13/25</a:t>
+              <a:t>8/7/25</a:t>
             </a:fld>
             <a:endParaRPr lang="en-US" dirty="0"/>
           </a:p>
@@ -5048,7 +5054,7 @@
           <a:p>
             <a:fld id="{48A87A34-81AB-432B-8DAE-1953F412C126}" type="datetimeFigureOut">
               <a:rPr lang="en-US" dirty="0"/>
-              <a:t>7/13/25</a:t>
+              <a:t>8/7/25</a:t>
             </a:fld>
             <a:endParaRPr lang="en-US" dirty="0"/>
           </a:p>
@@ -5287,7 +5293,7 @@
             <a:fld id="{48A87A34-81AB-432B-8DAE-1953F412C126}" type="datetimeFigureOut">
               <a:rPr lang="en-US" dirty="0"/>
               <a:pPr/>
-              <a:t>7/13/25</a:t>
+              <a:t>8/7/25</a:t>
             </a:fld>
             <a:endParaRPr lang="en-US" dirty="0"/>
           </a:p>
@@ -7215,7 +7221,7 @@
         <p:spPr/>
         <p:txBody>
           <a:bodyPr>
-            <a:normAutofit/>
+            <a:normAutofit lnSpcReduction="10000"/>
           </a:bodyPr>
           <a:lstStyle/>
           <a:p>
@@ -7226,7 +7232,7 @@
             </a:pPr>
             <a:r>
               <a:rPr lang="en-US" dirty="0"/>
-              <a:t>JavaScript is a scripting or programming language that allows one to implement complex features on web pages</a:t>
+              <a:t>JavaScript is a scripting or programming language that allows for interactive web pages by enabling dynamic content such as:</a:t>
             </a:r>
           </a:p>
           <a:p>
@@ -7237,7 +7243,7 @@
             </a:pPr>
             <a:r>
               <a:rPr lang="en-US" dirty="0"/>
-              <a:t>Displaying timely content updates</a:t>
+              <a:t>Real-time content updates</a:t>
             </a:r>
           </a:p>
           <a:p>
@@ -7249,6 +7255,17 @@
             <a:r>
               <a:rPr lang="en-US" dirty="0"/>
               <a:t>Interactive maps</a:t>
+            </a:r>
+          </a:p>
+          <a:p>
+            <a:pPr lvl="1">
+              <a:lnSpc>
+                <a:spcPct val="150000"/>
+              </a:lnSpc>
+            </a:pPr>
+            <a:r>
+              <a:rPr lang="en-US" dirty="0"/>
+              <a:t>Form validation</a:t>
             </a:r>
           </a:p>
           <a:p>
@@ -7688,6 +7705,118 @@
             </a:r>
           </a:p>
           <a:p>
+            <a:pPr lvl="1">
+              <a:lnSpc>
+                <a:spcPct val="150000"/>
+              </a:lnSpc>
+            </a:pPr>
+            <a:r>
+              <a:rPr lang="en-US" dirty="0">
+                <a:cs typeface="Courier New" panose="02070309020205020404" pitchFamily="49" charset="0"/>
+              </a:rPr>
+              <a:t>Causes a box to pop up on the screen with whatever message is put in the parentheses</a:t>
+            </a:r>
+            <a:br>
+              <a:rPr lang="en-US" b="1" dirty="0">
+                <a:latin typeface="Courier New" panose="02070309020205020404" pitchFamily="49" charset="0"/>
+                <a:cs typeface="Courier New" panose="02070309020205020404" pitchFamily="49" charset="0"/>
+              </a:rPr>
+            </a:br>
+            <a:r>
+              <a:rPr lang="en-US" b="1" dirty="0">
+                <a:latin typeface="Courier New" panose="02070309020205020404" pitchFamily="49" charset="0"/>
+                <a:cs typeface="Courier New" panose="02070309020205020404" pitchFamily="49" charset="0"/>
+              </a:rPr>
+              <a:t>alert(“Hi there!”);</a:t>
+            </a:r>
+          </a:p>
+        </p:txBody>
+      </p:sp>
+    </p:spTree>
+    <p:extLst>
+      <p:ext uri="{BB962C8B-B14F-4D97-AF65-F5344CB8AC3E}">
+        <p14:creationId xmlns:p14="http://schemas.microsoft.com/office/powerpoint/2010/main" val="1358443088"/>
+      </p:ext>
+    </p:extLst>
+  </p:cSld>
+  <p:clrMapOvr>
+    <a:masterClrMapping/>
+  </p:clrMapOvr>
+</p:sld>
+</file>
+
+<file path=ppt/slides/slide23.xml><?xml version="1.0" encoding="utf-8"?>
+<p:sld xmlns:a="http://schemas.openxmlformats.org/drawingml/2006/main" xmlns:r="http://schemas.openxmlformats.org/officeDocument/2006/relationships" xmlns:p="http://schemas.openxmlformats.org/presentationml/2006/main">
+  <p:cSld>
+    <p:spTree>
+      <p:nvGrpSpPr>
+        <p:cNvPr id="1" name="">
+          <a:extLst>
+            <a:ext uri="{FF2B5EF4-FFF2-40B4-BE49-F238E27FC236}">
+              <a16:creationId xmlns:a16="http://schemas.microsoft.com/office/drawing/2014/main" id="{E678A028-5508-DA0B-6EE0-A48ECF03480F}"/>
+            </a:ext>
+          </a:extLst>
+        </p:cNvPr>
+        <p:cNvGrpSpPr/>
+        <p:nvPr/>
+      </p:nvGrpSpPr>
+      <p:grpSpPr>
+        <a:xfrm>
+          <a:off x="0" y="0"/>
+          <a:ext cx="0" cy="0"/>
+          <a:chOff x="0" y="0"/>
+          <a:chExt cx="0" cy="0"/>
+        </a:xfrm>
+      </p:grpSpPr>
+      <p:sp>
+        <p:nvSpPr>
+          <p:cNvPr id="2" name="Title 1">
+            <a:extLst>
+              <a:ext uri="{FF2B5EF4-FFF2-40B4-BE49-F238E27FC236}">
+                <a16:creationId xmlns:a16="http://schemas.microsoft.com/office/drawing/2014/main" id="{FBE4B8E5-E763-7658-0007-A63190839D5A}"/>
+              </a:ext>
+            </a:extLst>
+          </p:cNvPr>
+          <p:cNvSpPr>
+            <a:spLocks noGrp="1"/>
+          </p:cNvSpPr>
+          <p:nvPr>
+            <p:ph type="title"/>
+          </p:nvPr>
+        </p:nvSpPr>
+        <p:spPr/>
+        <p:txBody>
+          <a:bodyPr/>
+          <a:lstStyle/>
+          <a:p>
+            <a:r>
+              <a:rPr lang="en-US" dirty="0"/>
+              <a:t>Useful JavaScript Methods</a:t>
+            </a:r>
+          </a:p>
+        </p:txBody>
+      </p:sp>
+      <p:sp>
+        <p:nvSpPr>
+          <p:cNvPr id="3" name="Content Placeholder 2">
+            <a:extLst>
+              <a:ext uri="{FF2B5EF4-FFF2-40B4-BE49-F238E27FC236}">
+                <a16:creationId xmlns:a16="http://schemas.microsoft.com/office/drawing/2014/main" id="{E3EE3135-A79F-BC80-9779-8A80EFCCCC79}"/>
+              </a:ext>
+            </a:extLst>
+          </p:cNvPr>
+          <p:cNvSpPr>
+            <a:spLocks noGrp="1"/>
+          </p:cNvSpPr>
+          <p:nvPr>
+            <p:ph idx="1"/>
+          </p:nvPr>
+        </p:nvSpPr>
+        <p:spPr/>
+        <p:txBody>
+          <a:bodyPr/>
+          <a:lstStyle/>
+          <a:p>
             <a:pPr>
               <a:lnSpc>
                 <a:spcPct val="150000"/>
@@ -7702,6 +7831,118 @@
             </a:r>
           </a:p>
           <a:p>
+            <a:pPr lvl="1">
+              <a:lnSpc>
+                <a:spcPct val="150000"/>
+              </a:lnSpc>
+            </a:pPr>
+            <a:r>
+              <a:rPr lang="en-US" dirty="0">
+                <a:cs typeface="Courier New" panose="02070309020205020404" pitchFamily="49" charset="0"/>
+              </a:rPr>
+              <a:t>Same as alert, but also includes an input box for the user to type something in that will be saved in a variable or otherwise used in the code somehow</a:t>
+            </a:r>
+            <a:br>
+              <a:rPr lang="en-US" b="1" dirty="0">
+                <a:latin typeface="Courier New" panose="02070309020205020404" pitchFamily="49" charset="0"/>
+                <a:cs typeface="Courier New" panose="02070309020205020404" pitchFamily="49" charset="0"/>
+              </a:rPr>
+            </a:br>
+            <a:r>
+              <a:rPr lang="en-US" b="1" dirty="0">
+                <a:latin typeface="Courier New" panose="02070309020205020404" pitchFamily="49" charset="0"/>
+                <a:cs typeface="Courier New" panose="02070309020205020404" pitchFamily="49" charset="0"/>
+              </a:rPr>
+              <a:t>let age = prompt(“Please enter your age: “);</a:t>
+            </a:r>
+          </a:p>
+        </p:txBody>
+      </p:sp>
+    </p:spTree>
+    <p:extLst>
+      <p:ext uri="{BB962C8B-B14F-4D97-AF65-F5344CB8AC3E}">
+        <p14:creationId xmlns:p14="http://schemas.microsoft.com/office/powerpoint/2010/main" val="2674472734"/>
+      </p:ext>
+    </p:extLst>
+  </p:cSld>
+  <p:clrMapOvr>
+    <a:masterClrMapping/>
+  </p:clrMapOvr>
+</p:sld>
+</file>
+
+<file path=ppt/slides/slide24.xml><?xml version="1.0" encoding="utf-8"?>
+<p:sld xmlns:a="http://schemas.openxmlformats.org/drawingml/2006/main" xmlns:r="http://schemas.openxmlformats.org/officeDocument/2006/relationships" xmlns:p="http://schemas.openxmlformats.org/presentationml/2006/main">
+  <p:cSld>
+    <p:spTree>
+      <p:nvGrpSpPr>
+        <p:cNvPr id="1" name="">
+          <a:extLst>
+            <a:ext uri="{FF2B5EF4-FFF2-40B4-BE49-F238E27FC236}">
+              <a16:creationId xmlns:a16="http://schemas.microsoft.com/office/drawing/2014/main" id="{20A6B9AC-EC1A-53F3-E4CE-3039CDC9E0DA}"/>
+            </a:ext>
+          </a:extLst>
+        </p:cNvPr>
+        <p:cNvGrpSpPr/>
+        <p:nvPr/>
+      </p:nvGrpSpPr>
+      <p:grpSpPr>
+        <a:xfrm>
+          <a:off x="0" y="0"/>
+          <a:ext cx="0" cy="0"/>
+          <a:chOff x="0" y="0"/>
+          <a:chExt cx="0" cy="0"/>
+        </a:xfrm>
+      </p:grpSpPr>
+      <p:sp>
+        <p:nvSpPr>
+          <p:cNvPr id="2" name="Title 1">
+            <a:extLst>
+              <a:ext uri="{FF2B5EF4-FFF2-40B4-BE49-F238E27FC236}">
+                <a16:creationId xmlns:a16="http://schemas.microsoft.com/office/drawing/2014/main" id="{57365E91-1BCD-7AD0-D4CC-5B0159162F26}"/>
+              </a:ext>
+            </a:extLst>
+          </p:cNvPr>
+          <p:cNvSpPr>
+            <a:spLocks noGrp="1"/>
+          </p:cNvSpPr>
+          <p:nvPr>
+            <p:ph type="title"/>
+          </p:nvPr>
+        </p:nvSpPr>
+        <p:spPr/>
+        <p:txBody>
+          <a:bodyPr/>
+          <a:lstStyle/>
+          <a:p>
+            <a:r>
+              <a:rPr lang="en-US" dirty="0"/>
+              <a:t>Useful JavaScript Methods</a:t>
+            </a:r>
+          </a:p>
+        </p:txBody>
+      </p:sp>
+      <p:sp>
+        <p:nvSpPr>
+          <p:cNvPr id="3" name="Content Placeholder 2">
+            <a:extLst>
+              <a:ext uri="{FF2B5EF4-FFF2-40B4-BE49-F238E27FC236}">
+                <a16:creationId xmlns:a16="http://schemas.microsoft.com/office/drawing/2014/main" id="{2B88BB45-31CF-92BD-1001-3E609E3E5AED}"/>
+              </a:ext>
+            </a:extLst>
+          </p:cNvPr>
+          <p:cNvSpPr>
+            <a:spLocks noGrp="1"/>
+          </p:cNvSpPr>
+          <p:nvPr>
+            <p:ph idx="1"/>
+          </p:nvPr>
+        </p:nvSpPr>
+        <p:spPr/>
+        <p:txBody>
+          <a:bodyPr/>
+          <a:lstStyle/>
+          <a:p>
             <a:pPr>
               <a:lnSpc>
                 <a:spcPct val="150000"/>
@@ -7715,12 +7956,566 @@
               <a:t>console.log();</a:t>
             </a:r>
           </a:p>
+          <a:p>
+            <a:pPr lvl="1">
+              <a:lnSpc>
+                <a:spcPct val="150000"/>
+              </a:lnSpc>
+            </a:pPr>
+            <a:r>
+              <a:rPr lang="en-US" dirty="0">
+                <a:cs typeface="Courier New" panose="02070309020205020404" pitchFamily="49" charset="0"/>
+              </a:rPr>
+              <a:t>Prints into the browser’s console whatever is written within the method’s parentheses</a:t>
+            </a:r>
+          </a:p>
+          <a:p>
+            <a:pPr lvl="1">
+              <a:lnSpc>
+                <a:spcPct val="150000"/>
+              </a:lnSpc>
+            </a:pPr>
+            <a:r>
+              <a:rPr lang="en-US" dirty="0">
+                <a:cs typeface="Courier New" panose="02070309020205020404" pitchFamily="49" charset="0"/>
+              </a:rPr>
+              <a:t>Accessing the console</a:t>
+            </a:r>
+          </a:p>
+          <a:p>
+            <a:pPr lvl="2">
+              <a:lnSpc>
+                <a:spcPct val="150000"/>
+              </a:lnSpc>
+            </a:pPr>
+            <a:r>
+              <a:rPr lang="en-US" dirty="0">
+                <a:cs typeface="Courier New" panose="02070309020205020404" pitchFamily="49" charset="0"/>
+              </a:rPr>
+              <a:t>Hit </a:t>
+            </a:r>
+            <a:r>
+              <a:rPr lang="en-US" b="1" dirty="0">
+                <a:cs typeface="Courier New" panose="02070309020205020404" pitchFamily="49" charset="0"/>
+              </a:rPr>
+              <a:t>F12</a:t>
+            </a:r>
+            <a:r>
+              <a:rPr lang="en-US" dirty="0">
+                <a:cs typeface="Courier New" panose="02070309020205020404" pitchFamily="49" charset="0"/>
+              </a:rPr>
+              <a:t> key or right-click on web page and click “</a:t>
+            </a:r>
+            <a:r>
+              <a:rPr lang="en-US" b="1" dirty="0">
+                <a:cs typeface="Courier New" panose="02070309020205020404" pitchFamily="49" charset="0"/>
+              </a:rPr>
+              <a:t>Inspect</a:t>
+            </a:r>
+            <a:r>
+              <a:rPr lang="en-US" dirty="0">
+                <a:cs typeface="Courier New" panose="02070309020205020404" pitchFamily="49" charset="0"/>
+              </a:rPr>
+              <a:t>” to open Developer Tools</a:t>
+            </a:r>
+          </a:p>
+          <a:p>
+            <a:pPr lvl="2">
+              <a:lnSpc>
+                <a:spcPct val="150000"/>
+              </a:lnSpc>
+            </a:pPr>
+            <a:r>
+              <a:rPr lang="en-US" dirty="0">
+                <a:cs typeface="Courier New" panose="02070309020205020404" pitchFamily="49" charset="0"/>
+              </a:rPr>
+              <a:t>Click on </a:t>
+            </a:r>
+            <a:r>
+              <a:rPr lang="en-US" b="1" dirty="0">
+                <a:cs typeface="Courier New" panose="02070309020205020404" pitchFamily="49" charset="0"/>
+              </a:rPr>
+              <a:t>Console</a:t>
+            </a:r>
+            <a:r>
+              <a:rPr lang="en-US" dirty="0">
+                <a:cs typeface="Courier New" panose="02070309020205020404" pitchFamily="49" charset="0"/>
+              </a:rPr>
+              <a:t> at the top of Developer Tools</a:t>
+            </a:r>
+          </a:p>
         </p:txBody>
       </p:sp>
     </p:spTree>
     <p:extLst>
       <p:ext uri="{BB962C8B-B14F-4D97-AF65-F5344CB8AC3E}">
-        <p14:creationId xmlns:p14="http://schemas.microsoft.com/office/powerpoint/2010/main" val="1358443088"/>
+        <p14:creationId xmlns:p14="http://schemas.microsoft.com/office/powerpoint/2010/main" val="506366830"/>
+      </p:ext>
+    </p:extLst>
+  </p:cSld>
+  <p:clrMapOvr>
+    <a:masterClrMapping/>
+  </p:clrMapOvr>
+</p:sld>
+</file>
+
+<file path=ppt/slides/slide25.xml><?xml version="1.0" encoding="utf-8"?>
+<p:sld xmlns:a="http://schemas.openxmlformats.org/drawingml/2006/main" xmlns:r="http://schemas.openxmlformats.org/officeDocument/2006/relationships" xmlns:p="http://schemas.openxmlformats.org/presentationml/2006/main">
+  <p:cSld>
+    <p:spTree>
+      <p:nvGrpSpPr>
+        <p:cNvPr id="1" name=""/>
+        <p:cNvGrpSpPr/>
+        <p:nvPr/>
+      </p:nvGrpSpPr>
+      <p:grpSpPr>
+        <a:xfrm>
+          <a:off x="0" y="0"/>
+          <a:ext cx="0" cy="0"/>
+          <a:chOff x="0" y="0"/>
+          <a:chExt cx="0" cy="0"/>
+        </a:xfrm>
+      </p:grpSpPr>
+      <p:pic>
+        <p:nvPicPr>
+          <p:cNvPr id="3" name="Picture 2">
+            <a:extLst>
+              <a:ext uri="{FF2B5EF4-FFF2-40B4-BE49-F238E27FC236}">
+                <a16:creationId xmlns:a16="http://schemas.microsoft.com/office/drawing/2014/main" id="{F63A3F8E-2A0B-869C-377A-19212E02DF3B}"/>
+              </a:ext>
+            </a:extLst>
+          </p:cNvPr>
+          <p:cNvPicPr>
+            <a:picLocks noChangeAspect="1"/>
+          </p:cNvPicPr>
+          <p:nvPr/>
+        </p:nvPicPr>
+        <p:blipFill>
+          <a:blip r:embed="rId2"/>
+          <a:stretch>
+            <a:fillRect/>
+          </a:stretch>
+        </p:blipFill>
+        <p:spPr>
+          <a:xfrm>
+            <a:off x="823374" y="0"/>
+            <a:ext cx="10545252" cy="6858000"/>
+          </a:xfrm>
+          <a:prstGeom prst="rect">
+            <a:avLst/>
+          </a:prstGeom>
+        </p:spPr>
+      </p:pic>
+    </p:spTree>
+    <p:extLst>
+      <p:ext uri="{BB962C8B-B14F-4D97-AF65-F5344CB8AC3E}">
+        <p14:creationId xmlns:p14="http://schemas.microsoft.com/office/powerpoint/2010/main" val="602207211"/>
+      </p:ext>
+    </p:extLst>
+  </p:cSld>
+  <p:clrMapOvr>
+    <a:masterClrMapping/>
+  </p:clrMapOvr>
+</p:sld>
+</file>
+
+<file path=ppt/slides/slide26.xml><?xml version="1.0" encoding="utf-8"?>
+<p:sld xmlns:a="http://schemas.openxmlformats.org/drawingml/2006/main" xmlns:r="http://schemas.openxmlformats.org/officeDocument/2006/relationships" xmlns:p="http://schemas.openxmlformats.org/presentationml/2006/main">
+  <p:cSld>
+    <p:spTree>
+      <p:nvGrpSpPr>
+        <p:cNvPr id="1" name=""/>
+        <p:cNvGrpSpPr/>
+        <p:nvPr/>
+      </p:nvGrpSpPr>
+      <p:grpSpPr>
+        <a:xfrm>
+          <a:off x="0" y="0"/>
+          <a:ext cx="0" cy="0"/>
+          <a:chOff x="0" y="0"/>
+          <a:chExt cx="0" cy="0"/>
+        </a:xfrm>
+      </p:grpSpPr>
+      <p:pic>
+        <p:nvPicPr>
+          <p:cNvPr id="3" name="Picture 2">
+            <a:extLst>
+              <a:ext uri="{FF2B5EF4-FFF2-40B4-BE49-F238E27FC236}">
+                <a16:creationId xmlns:a16="http://schemas.microsoft.com/office/drawing/2014/main" id="{FBEC5125-677E-8FEF-18D8-73EFE5DB9371}"/>
+              </a:ext>
+            </a:extLst>
+          </p:cNvPr>
+          <p:cNvPicPr>
+            <a:picLocks noChangeAspect="1"/>
+          </p:cNvPicPr>
+          <p:nvPr/>
+        </p:nvPicPr>
+        <p:blipFill>
+          <a:blip r:embed="rId2"/>
+          <a:stretch>
+            <a:fillRect/>
+          </a:stretch>
+        </p:blipFill>
+        <p:spPr>
+          <a:xfrm>
+            <a:off x="2796144" y="0"/>
+            <a:ext cx="6599712" cy="6858000"/>
+          </a:xfrm>
+          <a:prstGeom prst="rect">
+            <a:avLst/>
+          </a:prstGeom>
+        </p:spPr>
+      </p:pic>
+    </p:spTree>
+    <p:extLst>
+      <p:ext uri="{BB962C8B-B14F-4D97-AF65-F5344CB8AC3E}">
+        <p14:creationId xmlns:p14="http://schemas.microsoft.com/office/powerpoint/2010/main" val="1774782266"/>
+      </p:ext>
+    </p:extLst>
+  </p:cSld>
+  <p:clrMapOvr>
+    <a:masterClrMapping/>
+  </p:clrMapOvr>
+</p:sld>
+</file>
+
+<file path=ppt/slides/slide27.xml><?xml version="1.0" encoding="utf-8"?>
+<p:sld xmlns:a="http://schemas.openxmlformats.org/drawingml/2006/main" xmlns:r="http://schemas.openxmlformats.org/officeDocument/2006/relationships" xmlns:p="http://schemas.openxmlformats.org/presentationml/2006/main">
+  <p:cSld>
+    <p:spTree>
+      <p:nvGrpSpPr>
+        <p:cNvPr id="1" name=""/>
+        <p:cNvGrpSpPr/>
+        <p:nvPr/>
+      </p:nvGrpSpPr>
+      <p:grpSpPr>
+        <a:xfrm>
+          <a:off x="0" y="0"/>
+          <a:ext cx="0" cy="0"/>
+          <a:chOff x="0" y="0"/>
+          <a:chExt cx="0" cy="0"/>
+        </a:xfrm>
+      </p:grpSpPr>
+      <p:sp>
+        <p:nvSpPr>
+          <p:cNvPr id="2" name="Title 1">
+            <a:extLst>
+              <a:ext uri="{FF2B5EF4-FFF2-40B4-BE49-F238E27FC236}">
+                <a16:creationId xmlns:a16="http://schemas.microsoft.com/office/drawing/2014/main" id="{73655FEE-8809-F6C2-5506-F9C6597FCD4B}"/>
+              </a:ext>
+            </a:extLst>
+          </p:cNvPr>
+          <p:cNvSpPr>
+            <a:spLocks noGrp="1"/>
+          </p:cNvSpPr>
+          <p:nvPr>
+            <p:ph type="title"/>
+          </p:nvPr>
+        </p:nvSpPr>
+        <p:spPr/>
+        <p:txBody>
+          <a:bodyPr/>
+          <a:lstStyle/>
+          <a:p>
+            <a:r>
+              <a:rPr lang="en-US" dirty="0"/>
+              <a:t>References</a:t>
+            </a:r>
+          </a:p>
+        </p:txBody>
+      </p:sp>
+      <p:sp>
+        <p:nvSpPr>
+          <p:cNvPr id="3" name="Content Placeholder 2">
+            <a:extLst>
+              <a:ext uri="{FF2B5EF4-FFF2-40B4-BE49-F238E27FC236}">
+                <a16:creationId xmlns:a16="http://schemas.microsoft.com/office/drawing/2014/main" id="{AA8F3339-7D3E-E5C2-DEF2-FB12E7D9CAB8}"/>
+              </a:ext>
+            </a:extLst>
+          </p:cNvPr>
+          <p:cNvSpPr>
+            <a:spLocks noGrp="1"/>
+          </p:cNvSpPr>
+          <p:nvPr>
+            <p:ph idx="1"/>
+          </p:nvPr>
+        </p:nvSpPr>
+        <p:spPr/>
+        <p:txBody>
+          <a:bodyPr>
+            <a:normAutofit/>
+          </a:bodyPr>
+          <a:lstStyle/>
+          <a:p>
+            <a:pPr marL="457200" indent="-457200">
+              <a:spcAft>
+                <a:spcPts val="1200"/>
+              </a:spcAft>
+              <a:buFont typeface="+mj-lt"/>
+              <a:buAutoNum type="arabicPeriod"/>
+            </a:pPr>
+            <a:r>
+              <a:rPr lang="en-US" u="sng" dirty="0"/>
+              <a:t>What is JavaScript</a:t>
+            </a:r>
+            <a:r>
+              <a:rPr lang="en-US" dirty="0"/>
+              <a:t>?, MDN Web Docs, </a:t>
+            </a:r>
+            <a:r>
+              <a:rPr lang="en-US" dirty="0">
+                <a:hlinkClick r:id="rId2"/>
+              </a:rPr>
+              <a:t>https://developer.mozilla.org/en-US/docs/Learn/JavaScript/First_Steps/What_is_JavaScript</a:t>
+            </a:r>
+            <a:r>
+              <a:rPr lang="en-US" dirty="0"/>
+              <a:t>, accessed May 19, 2024.</a:t>
+            </a:r>
+          </a:p>
+          <a:p>
+            <a:pPr marL="457200" indent="-457200">
+              <a:spcAft>
+                <a:spcPts val="1200"/>
+              </a:spcAft>
+              <a:buFont typeface="+mj-lt"/>
+              <a:buAutoNum type="arabicPeriod"/>
+            </a:pPr>
+            <a:r>
+              <a:rPr lang="en-US" u="sng" dirty="0"/>
+              <a:t>Why JavaScript is called lightweight?</a:t>
+            </a:r>
+            <a:r>
+              <a:rPr lang="en-US" dirty="0"/>
+              <a:t>, Subodh Kumar, JavaScript in Plain English, Jan 3, 2022, </a:t>
+            </a:r>
+            <a:r>
+              <a:rPr lang="en-US" dirty="0">
+                <a:hlinkClick r:id="rId3"/>
+              </a:rPr>
+              <a:t>https://javascript.plainenglish.io/why-javascript-is-called-lightweight-5a1996db9ef6</a:t>
+            </a:r>
+            <a:r>
+              <a:rPr lang="en-US" dirty="0"/>
+              <a:t>, accessed May 19, 2024.</a:t>
+            </a:r>
+          </a:p>
+          <a:p>
+            <a:pPr marL="457200" indent="-457200">
+              <a:spcAft>
+                <a:spcPts val="1200"/>
+              </a:spcAft>
+              <a:buFont typeface="+mj-lt"/>
+              <a:buAutoNum type="arabicPeriod"/>
+            </a:pPr>
+            <a:r>
+              <a:rPr lang="en-US" u="sng" dirty="0"/>
+              <a:t>Introduction to JavaScript</a:t>
+            </a:r>
+            <a:r>
+              <a:rPr lang="en-US" dirty="0"/>
+              <a:t>, </a:t>
+            </a:r>
+            <a:r>
+              <a:rPr lang="en-US" dirty="0" err="1"/>
+              <a:t>GeeksForGeeks</a:t>
+            </a:r>
+            <a:r>
+              <a:rPr lang="en-US" dirty="0"/>
+              <a:t>, last updated Feb 2, 2024, </a:t>
+            </a:r>
+            <a:r>
+              <a:rPr lang="en-US" dirty="0">
+                <a:hlinkClick r:id="rId4"/>
+              </a:rPr>
+              <a:t>https://www.geeksforgeeks.org/introduction-to-javascript/</a:t>
+            </a:r>
+            <a:r>
+              <a:rPr lang="en-US" dirty="0"/>
+              <a:t>, accessed May 19, 2024.</a:t>
+            </a:r>
+          </a:p>
+        </p:txBody>
+      </p:sp>
+    </p:spTree>
+    <p:extLst>
+      <p:ext uri="{BB962C8B-B14F-4D97-AF65-F5344CB8AC3E}">
+        <p14:creationId xmlns:p14="http://schemas.microsoft.com/office/powerpoint/2010/main" val="2505309451"/>
+      </p:ext>
+    </p:extLst>
+  </p:cSld>
+  <p:clrMapOvr>
+    <a:masterClrMapping/>
+  </p:clrMapOvr>
+</p:sld>
+</file>
+
+<file path=ppt/slides/slide28.xml><?xml version="1.0" encoding="utf-8"?>
+<p:sld xmlns:a="http://schemas.openxmlformats.org/drawingml/2006/main" xmlns:r="http://schemas.openxmlformats.org/officeDocument/2006/relationships" xmlns:p="http://schemas.openxmlformats.org/presentationml/2006/main">
+  <p:cSld>
+    <p:spTree>
+      <p:nvGrpSpPr>
+        <p:cNvPr id="1" name=""/>
+        <p:cNvGrpSpPr/>
+        <p:nvPr/>
+      </p:nvGrpSpPr>
+      <p:grpSpPr>
+        <a:xfrm>
+          <a:off x="0" y="0"/>
+          <a:ext cx="0" cy="0"/>
+          <a:chOff x="0" y="0"/>
+          <a:chExt cx="0" cy="0"/>
+        </a:xfrm>
+      </p:grpSpPr>
+      <p:sp>
+        <p:nvSpPr>
+          <p:cNvPr id="2" name="Title 1">
+            <a:extLst>
+              <a:ext uri="{FF2B5EF4-FFF2-40B4-BE49-F238E27FC236}">
+                <a16:creationId xmlns:a16="http://schemas.microsoft.com/office/drawing/2014/main" id="{DBD81078-975B-691B-F029-DFC3751102AF}"/>
+              </a:ext>
+            </a:extLst>
+          </p:cNvPr>
+          <p:cNvSpPr>
+            <a:spLocks noGrp="1"/>
+          </p:cNvSpPr>
+          <p:nvPr>
+            <p:ph type="title"/>
+          </p:nvPr>
+        </p:nvSpPr>
+        <p:spPr/>
+        <p:txBody>
+          <a:bodyPr/>
+          <a:lstStyle/>
+          <a:p>
+            <a:r>
+              <a:rPr lang="en-US" dirty="0"/>
+              <a:t>References (cont’d)</a:t>
+            </a:r>
+          </a:p>
+        </p:txBody>
+      </p:sp>
+      <p:sp>
+        <p:nvSpPr>
+          <p:cNvPr id="3" name="Content Placeholder 2">
+            <a:extLst>
+              <a:ext uri="{FF2B5EF4-FFF2-40B4-BE49-F238E27FC236}">
+                <a16:creationId xmlns:a16="http://schemas.microsoft.com/office/drawing/2014/main" id="{AAB18BE0-4107-4276-0ADA-D8F30FECD075}"/>
+              </a:ext>
+            </a:extLst>
+          </p:cNvPr>
+          <p:cNvSpPr>
+            <a:spLocks noGrp="1"/>
+          </p:cNvSpPr>
+          <p:nvPr>
+            <p:ph idx="1"/>
+          </p:nvPr>
+        </p:nvSpPr>
+        <p:spPr/>
+        <p:txBody>
+          <a:bodyPr/>
+          <a:lstStyle/>
+          <a:p>
+            <a:pPr marL="457200" indent="-457200">
+              <a:spcAft>
+                <a:spcPts val="1200"/>
+              </a:spcAft>
+              <a:buFont typeface="+mj-lt"/>
+              <a:buAutoNum type="arabicPeriod" startAt="4"/>
+            </a:pPr>
+            <a:r>
+              <a:rPr lang="en-US" u="sng" dirty="0"/>
+              <a:t>Interpreted vs Compiled Programming Languages: What’s the Difference?</a:t>
+            </a:r>
+            <a:r>
+              <a:rPr lang="en-US" dirty="0"/>
+              <a:t>, Free Code Camp, January 10, 2020, </a:t>
+            </a:r>
+            <a:r>
+              <a:rPr lang="en-US" dirty="0">
+                <a:hlinkClick r:id="rId2"/>
+              </a:rPr>
+              <a:t>https://www.freecodecamp.org/news/compiled-versus-interpreted-languages/</a:t>
+            </a:r>
+            <a:r>
+              <a:rPr lang="en-US" dirty="0"/>
+              <a:t>, accessed May 19, 2024.</a:t>
+            </a:r>
+          </a:p>
+          <a:p>
+            <a:pPr marL="457200" indent="-457200">
+              <a:spcAft>
+                <a:spcPts val="1200"/>
+              </a:spcAft>
+              <a:buFont typeface="+mj-lt"/>
+              <a:buAutoNum type="arabicPeriod" startAt="4"/>
+            </a:pPr>
+            <a:r>
+              <a:rPr lang="en-US" u="sng" dirty="0"/>
+              <a:t>Why is JavaScript Single Threaded?</a:t>
+            </a:r>
+            <a:r>
+              <a:rPr lang="en-US" dirty="0"/>
+              <a:t>, Matt Long, Grove Technology, July 21, 2023, </a:t>
+            </a:r>
+            <a:r>
+              <a:rPr lang="en" u="sng" dirty="0">
+                <a:solidFill>
+                  <a:schemeClr val="hlink"/>
+                </a:solidFill>
+                <a:hlinkClick r:id="rId3"/>
+              </a:rPr>
+              <a:t>https://groovetechnology.com/blog/why-javascript-is-single-threaded/#:~:text=JavaScript%20was%20designed%20to%20be,interactivity%20to%20static%20web%20pages</a:t>
+            </a:r>
+            <a:r>
+              <a:rPr lang="en-US" u="sng" dirty="0">
+                <a:solidFill>
+                  <a:schemeClr val="hlink"/>
+                </a:solidFill>
+              </a:rPr>
+              <a:t>,</a:t>
+            </a:r>
+            <a:r>
+              <a:rPr lang="en-US" dirty="0"/>
+              <a:t> accessed May 19, 2024.</a:t>
+            </a:r>
+          </a:p>
+          <a:p>
+            <a:pPr marL="457200" indent="-457200">
+              <a:spcAft>
+                <a:spcPts val="1200"/>
+              </a:spcAft>
+              <a:buFont typeface="+mj-lt"/>
+              <a:buAutoNum type="arabicPeriod" startAt="4"/>
+            </a:pPr>
+            <a:r>
+              <a:rPr lang="en-US" dirty="0"/>
+              <a:t>Just in Time Compilation Explained, Free Code Camp, Feb 1, 2020, </a:t>
+            </a:r>
+            <a:r>
+              <a:rPr lang="en-US" dirty="0">
+                <a:hlinkClick r:id="rId4"/>
+              </a:rPr>
+              <a:t>https://www.freecodecamp.org/news/just-in-time-compilation-explained</a:t>
+            </a:r>
+            <a:r>
+              <a:rPr lang="en-US">
+                <a:hlinkClick r:id="rId4"/>
+              </a:rPr>
+              <a:t>/</a:t>
+            </a:r>
+            <a:r>
+              <a:rPr lang="en-US"/>
+              <a:t>, accessed May 19, 2024.</a:t>
+            </a:r>
+            <a:endParaRPr lang="en-US" dirty="0"/>
+          </a:p>
+        </p:txBody>
+      </p:sp>
+    </p:spTree>
+    <p:extLst>
+      <p:ext uri="{BB962C8B-B14F-4D97-AF65-F5344CB8AC3E}">
+        <p14:creationId xmlns:p14="http://schemas.microsoft.com/office/powerpoint/2010/main" val="3452872806"/>
       </p:ext>
     </p:extLst>
   </p:cSld>

--- a/slides for class/my slides/About JavaScript - new template.pptx
+++ b/slides for class/my slides/About JavaScript - new template.pptx
@@ -4,6 +4,9 @@
   <p:sldMasterIdLst>
     <p:sldMasterId id="2147483648" r:id="rId1"/>
   </p:sldMasterIdLst>
+  <p:notesMasterIdLst>
+    <p:notesMasterId r:id="rId30"/>
+  </p:notesMasterIdLst>
   <p:sldIdLst>
     <p:sldId id="256" r:id="rId2"/>
     <p:sldId id="257" r:id="rId3"/>
@@ -148,6 +151,439 @@
     </p:ext>
   </p:extLst>
 </p:presentation>
+</file>
+
+<file path=ppt/notesMasters/notesMaster1.xml><?xml version="1.0" encoding="utf-8"?>
+<p:notesMaster xmlns:a="http://schemas.openxmlformats.org/drawingml/2006/main" xmlns:r="http://schemas.openxmlformats.org/officeDocument/2006/relationships" xmlns:p="http://schemas.openxmlformats.org/presentationml/2006/main">
+  <p:cSld>
+    <p:bg>
+      <p:bgRef idx="1001">
+        <a:schemeClr val="bg1"/>
+      </p:bgRef>
+    </p:bg>
+    <p:spTree>
+      <p:nvGrpSpPr>
+        <p:cNvPr id="1" name=""/>
+        <p:cNvGrpSpPr/>
+        <p:nvPr/>
+      </p:nvGrpSpPr>
+      <p:grpSpPr>
+        <a:xfrm>
+          <a:off x="0" y="0"/>
+          <a:ext cx="0" cy="0"/>
+          <a:chOff x="0" y="0"/>
+          <a:chExt cx="0" cy="0"/>
+        </a:xfrm>
+      </p:grpSpPr>
+      <p:sp>
+        <p:nvSpPr>
+          <p:cNvPr id="2" name="Header Placeholder 1"/>
+          <p:cNvSpPr>
+            <a:spLocks noGrp="1"/>
+          </p:cNvSpPr>
+          <p:nvPr>
+            <p:ph type="hdr" sz="quarter"/>
+          </p:nvPr>
+        </p:nvSpPr>
+        <p:spPr>
+          <a:xfrm>
+            <a:off x="0" y="0"/>
+            <a:ext cx="2971800" cy="458788"/>
+          </a:xfrm>
+          <a:prstGeom prst="rect">
+            <a:avLst/>
+          </a:prstGeom>
+        </p:spPr>
+        <p:txBody>
+          <a:bodyPr vert="horz" lIns="91440" tIns="45720" rIns="91440" bIns="45720" rtlCol="0"/>
+          <a:lstStyle>
+            <a:lvl1pPr algn="l">
+              <a:defRPr sz="1200"/>
+            </a:lvl1pPr>
+          </a:lstStyle>
+          <a:p>
+            <a:endParaRPr lang="en-US"/>
+          </a:p>
+        </p:txBody>
+      </p:sp>
+      <p:sp>
+        <p:nvSpPr>
+          <p:cNvPr id="3" name="Date Placeholder 2"/>
+          <p:cNvSpPr>
+            <a:spLocks noGrp="1"/>
+          </p:cNvSpPr>
+          <p:nvPr>
+            <p:ph type="dt" idx="1"/>
+          </p:nvPr>
+        </p:nvSpPr>
+        <p:spPr>
+          <a:xfrm>
+            <a:off x="3884613" y="0"/>
+            <a:ext cx="2971800" cy="458788"/>
+          </a:xfrm>
+          <a:prstGeom prst="rect">
+            <a:avLst/>
+          </a:prstGeom>
+        </p:spPr>
+        <p:txBody>
+          <a:bodyPr vert="horz" lIns="91440" tIns="45720" rIns="91440" bIns="45720" rtlCol="0"/>
+          <a:lstStyle>
+            <a:lvl1pPr algn="r">
+              <a:defRPr sz="1200"/>
+            </a:lvl1pPr>
+          </a:lstStyle>
+          <a:p>
+            <a:fld id="{1B12555C-532B-514A-AF31-7298961CE2AA}" type="datetimeFigureOut">
+              <a:rPr lang="en-US" smtClean="0"/>
+              <a:t>8/31/25</a:t>
+            </a:fld>
+            <a:endParaRPr lang="en-US"/>
+          </a:p>
+        </p:txBody>
+      </p:sp>
+      <p:sp>
+        <p:nvSpPr>
+          <p:cNvPr id="4" name="Slide Image Placeholder 3"/>
+          <p:cNvSpPr>
+            <a:spLocks noGrp="1" noRot="1" noChangeAspect="1"/>
+          </p:cNvSpPr>
+          <p:nvPr>
+            <p:ph type="sldImg" idx="2"/>
+          </p:nvPr>
+        </p:nvSpPr>
+        <p:spPr>
+          <a:xfrm>
+            <a:off x="685800" y="1143000"/>
+            <a:ext cx="5486400" cy="3086100"/>
+          </a:xfrm>
+          <a:prstGeom prst="rect">
+            <a:avLst/>
+          </a:prstGeom>
+          <a:noFill/>
+          <a:ln w="12700">
+            <a:solidFill>
+              <a:prstClr val="black"/>
+            </a:solidFill>
+          </a:ln>
+        </p:spPr>
+        <p:txBody>
+          <a:bodyPr vert="horz" lIns="91440" tIns="45720" rIns="91440" bIns="45720" rtlCol="0" anchor="ctr"/>
+          <a:lstStyle/>
+          <a:p>
+            <a:endParaRPr lang="en-US"/>
+          </a:p>
+        </p:txBody>
+      </p:sp>
+      <p:sp>
+        <p:nvSpPr>
+          <p:cNvPr id="5" name="Notes Placeholder 4"/>
+          <p:cNvSpPr>
+            <a:spLocks noGrp="1"/>
+          </p:cNvSpPr>
+          <p:nvPr>
+            <p:ph type="body" sz="quarter" idx="3"/>
+          </p:nvPr>
+        </p:nvSpPr>
+        <p:spPr>
+          <a:xfrm>
+            <a:off x="685800" y="4400550"/>
+            <a:ext cx="5486400" cy="3600450"/>
+          </a:xfrm>
+          <a:prstGeom prst="rect">
+            <a:avLst/>
+          </a:prstGeom>
+        </p:spPr>
+        <p:txBody>
+          <a:bodyPr vert="horz" lIns="91440" tIns="45720" rIns="91440" bIns="45720" rtlCol="0"/>
+          <a:lstStyle/>
+          <a:p>
+            <a:pPr lvl="0"/>
+            <a:r>
+              <a:rPr lang="en-US"/>
+              <a:t>Click to edit Master text styles</a:t>
+            </a:r>
+          </a:p>
+          <a:p>
+            <a:pPr lvl="1"/>
+            <a:r>
+              <a:rPr lang="en-US"/>
+              <a:t>Second level</a:t>
+            </a:r>
+          </a:p>
+          <a:p>
+            <a:pPr lvl="2"/>
+            <a:r>
+              <a:rPr lang="en-US"/>
+              <a:t>Third level</a:t>
+            </a:r>
+          </a:p>
+          <a:p>
+            <a:pPr lvl="3"/>
+            <a:r>
+              <a:rPr lang="en-US"/>
+              <a:t>Fourth level</a:t>
+            </a:r>
+          </a:p>
+          <a:p>
+            <a:pPr lvl="4"/>
+            <a:r>
+              <a:rPr lang="en-US"/>
+              <a:t>Fifth level</a:t>
+            </a:r>
+          </a:p>
+        </p:txBody>
+      </p:sp>
+      <p:sp>
+        <p:nvSpPr>
+          <p:cNvPr id="6" name="Footer Placeholder 5"/>
+          <p:cNvSpPr>
+            <a:spLocks noGrp="1"/>
+          </p:cNvSpPr>
+          <p:nvPr>
+            <p:ph type="ftr" sz="quarter" idx="4"/>
+          </p:nvPr>
+        </p:nvSpPr>
+        <p:spPr>
+          <a:xfrm>
+            <a:off x="0" y="8685213"/>
+            <a:ext cx="2971800" cy="458787"/>
+          </a:xfrm>
+          <a:prstGeom prst="rect">
+            <a:avLst/>
+          </a:prstGeom>
+        </p:spPr>
+        <p:txBody>
+          <a:bodyPr vert="horz" lIns="91440" tIns="45720" rIns="91440" bIns="45720" rtlCol="0" anchor="b"/>
+          <a:lstStyle>
+            <a:lvl1pPr algn="l">
+              <a:defRPr sz="1200"/>
+            </a:lvl1pPr>
+          </a:lstStyle>
+          <a:p>
+            <a:endParaRPr lang="en-US"/>
+          </a:p>
+        </p:txBody>
+      </p:sp>
+      <p:sp>
+        <p:nvSpPr>
+          <p:cNvPr id="7" name="Slide Number Placeholder 6"/>
+          <p:cNvSpPr>
+            <a:spLocks noGrp="1"/>
+          </p:cNvSpPr>
+          <p:nvPr>
+            <p:ph type="sldNum" sz="quarter" idx="5"/>
+          </p:nvPr>
+        </p:nvSpPr>
+        <p:spPr>
+          <a:xfrm>
+            <a:off x="3884613" y="8685213"/>
+            <a:ext cx="2971800" cy="458787"/>
+          </a:xfrm>
+          <a:prstGeom prst="rect">
+            <a:avLst/>
+          </a:prstGeom>
+        </p:spPr>
+        <p:txBody>
+          <a:bodyPr vert="horz" lIns="91440" tIns="45720" rIns="91440" bIns="45720" rtlCol="0" anchor="b"/>
+          <a:lstStyle>
+            <a:lvl1pPr algn="r">
+              <a:defRPr sz="1200"/>
+            </a:lvl1pPr>
+          </a:lstStyle>
+          <a:p>
+            <a:fld id="{4A3FD9C7-AC88-5846-A9BC-962A00591675}" type="slidenum">
+              <a:rPr lang="en-US" smtClean="0"/>
+              <a:t>‹#›</a:t>
+            </a:fld>
+            <a:endParaRPr lang="en-US"/>
+          </a:p>
+        </p:txBody>
+      </p:sp>
+    </p:spTree>
+    <p:extLst>
+      <p:ext uri="{BB962C8B-B14F-4D97-AF65-F5344CB8AC3E}">
+        <p14:creationId xmlns:p14="http://schemas.microsoft.com/office/powerpoint/2010/main" val="3900076225"/>
+      </p:ext>
+    </p:extLst>
+  </p:cSld>
+  <p:clrMap bg1="lt1" tx1="dk1" bg2="lt2" tx2="dk2" accent1="accent1" accent2="accent2" accent3="accent3" accent4="accent4" accent5="accent5" accent6="accent6" hlink="hlink" folHlink="folHlink"/>
+  <p:notesStyle>
+    <a:lvl1pPr marL="0" algn="l" defTabSz="914400" rtl="0" eaLnBrk="1" latinLnBrk="0" hangingPunct="1">
+      <a:defRPr sz="1200" kern="1200">
+        <a:solidFill>
+          <a:schemeClr val="tx1"/>
+        </a:solidFill>
+        <a:latin typeface="+mn-lt"/>
+        <a:ea typeface="+mn-ea"/>
+        <a:cs typeface="+mn-cs"/>
+      </a:defRPr>
+    </a:lvl1pPr>
+    <a:lvl2pPr marL="457200" algn="l" defTabSz="914400" rtl="0" eaLnBrk="1" latinLnBrk="0" hangingPunct="1">
+      <a:defRPr sz="1200" kern="1200">
+        <a:solidFill>
+          <a:schemeClr val="tx1"/>
+        </a:solidFill>
+        <a:latin typeface="+mn-lt"/>
+        <a:ea typeface="+mn-ea"/>
+        <a:cs typeface="+mn-cs"/>
+      </a:defRPr>
+    </a:lvl2pPr>
+    <a:lvl3pPr marL="914400" algn="l" defTabSz="914400" rtl="0" eaLnBrk="1" latinLnBrk="0" hangingPunct="1">
+      <a:defRPr sz="1200" kern="1200">
+        <a:solidFill>
+          <a:schemeClr val="tx1"/>
+        </a:solidFill>
+        <a:latin typeface="+mn-lt"/>
+        <a:ea typeface="+mn-ea"/>
+        <a:cs typeface="+mn-cs"/>
+      </a:defRPr>
+    </a:lvl3pPr>
+    <a:lvl4pPr marL="1371600" algn="l" defTabSz="914400" rtl="0" eaLnBrk="1" latinLnBrk="0" hangingPunct="1">
+      <a:defRPr sz="1200" kern="1200">
+        <a:solidFill>
+          <a:schemeClr val="tx1"/>
+        </a:solidFill>
+        <a:latin typeface="+mn-lt"/>
+        <a:ea typeface="+mn-ea"/>
+        <a:cs typeface="+mn-cs"/>
+      </a:defRPr>
+    </a:lvl4pPr>
+    <a:lvl5pPr marL="1828800" algn="l" defTabSz="914400" rtl="0" eaLnBrk="1" latinLnBrk="0" hangingPunct="1">
+      <a:defRPr sz="1200" kern="1200">
+        <a:solidFill>
+          <a:schemeClr val="tx1"/>
+        </a:solidFill>
+        <a:latin typeface="+mn-lt"/>
+        <a:ea typeface="+mn-ea"/>
+        <a:cs typeface="+mn-cs"/>
+      </a:defRPr>
+    </a:lvl5pPr>
+    <a:lvl6pPr marL="2286000" algn="l" defTabSz="914400" rtl="0" eaLnBrk="1" latinLnBrk="0" hangingPunct="1">
+      <a:defRPr sz="1200" kern="1200">
+        <a:solidFill>
+          <a:schemeClr val="tx1"/>
+        </a:solidFill>
+        <a:latin typeface="+mn-lt"/>
+        <a:ea typeface="+mn-ea"/>
+        <a:cs typeface="+mn-cs"/>
+      </a:defRPr>
+    </a:lvl6pPr>
+    <a:lvl7pPr marL="2743200" algn="l" defTabSz="914400" rtl="0" eaLnBrk="1" latinLnBrk="0" hangingPunct="1">
+      <a:defRPr sz="1200" kern="1200">
+        <a:solidFill>
+          <a:schemeClr val="tx1"/>
+        </a:solidFill>
+        <a:latin typeface="+mn-lt"/>
+        <a:ea typeface="+mn-ea"/>
+        <a:cs typeface="+mn-cs"/>
+      </a:defRPr>
+    </a:lvl7pPr>
+    <a:lvl8pPr marL="3200400" algn="l" defTabSz="914400" rtl="0" eaLnBrk="1" latinLnBrk="0" hangingPunct="1">
+      <a:defRPr sz="1200" kern="1200">
+        <a:solidFill>
+          <a:schemeClr val="tx1"/>
+        </a:solidFill>
+        <a:latin typeface="+mn-lt"/>
+        <a:ea typeface="+mn-ea"/>
+        <a:cs typeface="+mn-cs"/>
+      </a:defRPr>
+    </a:lvl8pPr>
+    <a:lvl9pPr marL="3657600" algn="l" defTabSz="914400" rtl="0" eaLnBrk="1" latinLnBrk="0" hangingPunct="1">
+      <a:defRPr sz="1200" kern="1200">
+        <a:solidFill>
+          <a:schemeClr val="tx1"/>
+        </a:solidFill>
+        <a:latin typeface="+mn-lt"/>
+        <a:ea typeface="+mn-ea"/>
+        <a:cs typeface="+mn-cs"/>
+      </a:defRPr>
+    </a:lvl9pPr>
+  </p:notesStyle>
+</p:notesMaster>
+</file>
+
+<file path=ppt/notesSlides/notesSlide1.xml><?xml version="1.0" encoding="utf-8"?>
+<p:notes xmlns:a="http://schemas.openxmlformats.org/drawingml/2006/main" xmlns:r="http://schemas.openxmlformats.org/officeDocument/2006/relationships" xmlns:p="http://schemas.openxmlformats.org/presentationml/2006/main">
+  <p:cSld>
+    <p:spTree>
+      <p:nvGrpSpPr>
+        <p:cNvPr id="1" name=""/>
+        <p:cNvGrpSpPr/>
+        <p:nvPr/>
+      </p:nvGrpSpPr>
+      <p:grpSpPr>
+        <a:xfrm>
+          <a:off x="0" y="0"/>
+          <a:ext cx="0" cy="0"/>
+          <a:chOff x="0" y="0"/>
+          <a:chExt cx="0" cy="0"/>
+        </a:xfrm>
+      </p:grpSpPr>
+      <p:sp>
+        <p:nvSpPr>
+          <p:cNvPr id="2" name="Slide Image Placeholder 1"/>
+          <p:cNvSpPr>
+            <a:spLocks noGrp="1" noRot="1" noChangeAspect="1"/>
+          </p:cNvSpPr>
+          <p:nvPr>
+            <p:ph type="sldImg"/>
+          </p:nvPr>
+        </p:nvSpPr>
+        <p:spPr/>
+      </p:sp>
+      <p:sp>
+        <p:nvSpPr>
+          <p:cNvPr id="3" name="Notes Placeholder 2"/>
+          <p:cNvSpPr>
+            <a:spLocks noGrp="1"/>
+          </p:cNvSpPr>
+          <p:nvPr>
+            <p:ph type="body" idx="1"/>
+          </p:nvPr>
+        </p:nvSpPr>
+        <p:spPr/>
+        <p:txBody>
+          <a:bodyPr/>
+          <a:lstStyle/>
+          <a:p>
+            <a:endParaRPr lang="en-US" dirty="0"/>
+          </a:p>
+        </p:txBody>
+      </p:sp>
+      <p:sp>
+        <p:nvSpPr>
+          <p:cNvPr id="4" name="Slide Number Placeholder 3"/>
+          <p:cNvSpPr>
+            <a:spLocks noGrp="1"/>
+          </p:cNvSpPr>
+          <p:nvPr>
+            <p:ph type="sldNum" sz="quarter" idx="5"/>
+          </p:nvPr>
+        </p:nvSpPr>
+        <p:spPr/>
+        <p:txBody>
+          <a:bodyPr/>
+          <a:lstStyle/>
+          <a:p>
+            <a:fld id="{4A3FD9C7-AC88-5846-A9BC-962A00591675}" type="slidenum">
+              <a:rPr lang="en-US" smtClean="0"/>
+              <a:t>20</a:t>
+            </a:fld>
+            <a:endParaRPr lang="en-US"/>
+          </a:p>
+        </p:txBody>
+      </p:sp>
+    </p:spTree>
+    <p:extLst>
+      <p:ext uri="{BB962C8B-B14F-4D97-AF65-F5344CB8AC3E}">
+        <p14:creationId xmlns:p14="http://schemas.microsoft.com/office/powerpoint/2010/main" val="1132680894"/>
+      </p:ext>
+    </p:extLst>
+  </p:cSld>
+  <p:clrMapOvr>
+    <a:masterClrMapping/>
+  </p:clrMapOvr>
+</p:notes>
 </file>
 
 <file path=ppt/slideLayouts/slideLayout1.xml><?xml version="1.0" encoding="utf-8"?>
@@ -7423,7 +7859,7 @@
           <p:nvPr/>
         </p:nvPicPr>
         <p:blipFill>
-          <a:blip r:embed="rId2"/>
+          <a:blip r:embed="rId3"/>
           <a:stretch>
             <a:fillRect/>
           </a:stretch>
@@ -8496,19 +8932,12 @@
               <a:rPr lang="en-US" dirty="0">
                 <a:hlinkClick r:id="rId4"/>
               </a:rPr>
-              <a:t>https://www.freecodecamp.org/news/just-in-time-compilation-explained</a:t>
-            </a:r>
-            <a:r>
-              <a:rPr lang="en-US">
-                <a:hlinkClick r:id="rId4"/>
-              </a:rPr>
-              <a:t>/</a:t>
-            </a:r>
-            <a:r>
-              <a:rPr lang="en-US"/>
+              <a:t>https://www.freecodecamp.org/news/just-in-time-compilation-explained/</a:t>
+            </a:r>
+            <a:r>
+              <a:rPr lang="en-US" dirty="0"/>
               <a:t>, accessed May 19, 2024.</a:t>
             </a:r>
-            <a:endParaRPr lang="en-US" dirty="0"/>
           </a:p>
         </p:txBody>
       </p:sp>
@@ -9733,4 +10162,299 @@
     </a:ext>
   </a:extLst>
 </a:theme>
+</file>
+
+<file path=ppt/theme/theme2.xml><?xml version="1.0" encoding="utf-8"?>
+<a:theme xmlns:a="http://schemas.openxmlformats.org/drawingml/2006/main" name="Office Theme">
+  <a:themeElements>
+    <a:clrScheme name="Office">
+      <a:dk1>
+        <a:sysClr val="windowText" lastClr="000000"/>
+      </a:dk1>
+      <a:lt1>
+        <a:sysClr val="window" lastClr="FFFFFF"/>
+      </a:lt1>
+      <a:dk2>
+        <a:srgbClr val="44546A"/>
+      </a:dk2>
+      <a:lt2>
+        <a:srgbClr val="E7E6E6"/>
+      </a:lt2>
+      <a:accent1>
+        <a:srgbClr val="4472C4"/>
+      </a:accent1>
+      <a:accent2>
+        <a:srgbClr val="ED7D31"/>
+      </a:accent2>
+      <a:accent3>
+        <a:srgbClr val="A5A5A5"/>
+      </a:accent3>
+      <a:accent4>
+        <a:srgbClr val="FFC000"/>
+      </a:accent4>
+      <a:accent5>
+        <a:srgbClr val="5B9BD5"/>
+      </a:accent5>
+      <a:accent6>
+        <a:srgbClr val="70AD47"/>
+      </a:accent6>
+      <a:hlink>
+        <a:srgbClr val="0563C1"/>
+      </a:hlink>
+      <a:folHlink>
+        <a:srgbClr val="954F72"/>
+      </a:folHlink>
+    </a:clrScheme>
+    <a:fontScheme name="Office">
+      <a:majorFont>
+        <a:latin typeface="Calibri Light" panose="020F0302020204030204"/>
+        <a:ea typeface=""/>
+        <a:cs typeface=""/>
+        <a:font script="Jpan" typeface="游ゴシック Light"/>
+        <a:font script="Hang" typeface="맑은 고딕"/>
+        <a:font script="Hans" typeface="等线 Light"/>
+        <a:font script="Hant" typeface="新細明體"/>
+        <a:font script="Arab" typeface="Times New Roman"/>
+        <a:font script="Hebr" typeface="Times New Roman"/>
+        <a:font script="Thai" typeface="Angsana New"/>
+        <a:font script="Ethi" typeface="Nyala"/>
+        <a:font script="Beng" typeface="Vrinda"/>
+        <a:font script="Gujr" typeface="Shruti"/>
+        <a:font script="Khmr" typeface="MoolBoran"/>
+        <a:font script="Knda" typeface="Tunga"/>
+        <a:font script="Guru" typeface="Raavi"/>
+        <a:font script="Cans" typeface="Euphemia"/>
+        <a:font script="Cher" typeface="Plantagenet Cherokee"/>
+        <a:font script="Yiii" typeface="Microsoft Yi Baiti"/>
+        <a:font script="Tibt" typeface="Microsoft Himalaya"/>
+        <a:font script="Thaa" typeface="MV Boli"/>
+        <a:font script="Deva" typeface="Mangal"/>
+        <a:font script="Telu" typeface="Gautami"/>
+        <a:font script="Taml" typeface="Latha"/>
+        <a:font script="Syrc" typeface="Estrangelo Edessa"/>
+        <a:font script="Orya" typeface="Kalinga"/>
+        <a:font script="Mlym" typeface="Kartika"/>
+        <a:font script="Laoo" typeface="DokChampa"/>
+        <a:font script="Sinh" typeface="Iskoola Pota"/>
+        <a:font script="Mong" typeface="Mongolian Baiti"/>
+        <a:font script="Viet" typeface="Times New Roman"/>
+        <a:font script="Uigh" typeface="Microsoft Uighur"/>
+        <a:font script="Geor" typeface="Sylfaen"/>
+        <a:font script="Armn" typeface="Arial"/>
+        <a:font script="Bugi" typeface="Leelawadee UI"/>
+        <a:font script="Bopo" typeface="Microsoft JhengHei"/>
+        <a:font script="Java" typeface="Javanese Text"/>
+        <a:font script="Lisu" typeface="Segoe UI"/>
+        <a:font script="Mymr" typeface="Myanmar Text"/>
+        <a:font script="Nkoo" typeface="Ebrima"/>
+        <a:font script="Olck" typeface="Nirmala UI"/>
+        <a:font script="Osma" typeface="Ebrima"/>
+        <a:font script="Phag" typeface="Phagspa"/>
+        <a:font script="Syrn" typeface="Estrangelo Edessa"/>
+        <a:font script="Syrj" typeface="Estrangelo Edessa"/>
+        <a:font script="Syre" typeface="Estrangelo Edessa"/>
+        <a:font script="Sora" typeface="Nirmala UI"/>
+        <a:font script="Tale" typeface="Microsoft Tai Le"/>
+        <a:font script="Talu" typeface="Microsoft New Tai Lue"/>
+        <a:font script="Tfng" typeface="Ebrima"/>
+      </a:majorFont>
+      <a:minorFont>
+        <a:latin typeface="Calibri" panose="020F0502020204030204"/>
+        <a:ea typeface=""/>
+        <a:cs typeface=""/>
+        <a:font script="Jpan" typeface="游ゴシック"/>
+        <a:font script="Hang" typeface="맑은 고딕"/>
+        <a:font script="Hans" typeface="等线"/>
+        <a:font script="Hant" typeface="新細明體"/>
+        <a:font script="Arab" typeface="Arial"/>
+        <a:font script="Hebr" typeface="Arial"/>
+        <a:font script="Thai" typeface="Cordia New"/>
+        <a:font script="Ethi" typeface="Nyala"/>
+        <a:font script="Beng" typeface="Vrinda"/>
+        <a:font script="Gujr" typeface="Shruti"/>
+        <a:font script="Khmr" typeface="DaunPenh"/>
+        <a:font script="Knda" typeface="Tunga"/>
+        <a:font script="Guru" typeface="Raavi"/>
+        <a:font script="Cans" typeface="Euphemia"/>
+        <a:font script="Cher" typeface="Plantagenet Cherokee"/>
+        <a:font script="Yiii" typeface="Microsoft Yi Baiti"/>
+        <a:font script="Tibt" typeface="Microsoft Himalaya"/>
+        <a:font script="Thaa" typeface="MV Boli"/>
+        <a:font script="Deva" typeface="Mangal"/>
+        <a:font script="Telu" typeface="Gautami"/>
+        <a:font script="Taml" typeface="Latha"/>
+        <a:font script="Syrc" typeface="Estrangelo Edessa"/>
+        <a:font script="Orya" typeface="Kalinga"/>
+        <a:font script="Mlym" typeface="Kartika"/>
+        <a:font script="Laoo" typeface="DokChampa"/>
+        <a:font script="Sinh" typeface="Iskoola Pota"/>
+        <a:font script="Mong" typeface="Mongolian Baiti"/>
+        <a:font script="Viet" typeface="Arial"/>
+        <a:font script="Uigh" typeface="Microsoft Uighur"/>
+        <a:font script="Geor" typeface="Sylfaen"/>
+        <a:font script="Armn" typeface="Arial"/>
+        <a:font script="Bugi" typeface="Leelawadee UI"/>
+        <a:font script="Bopo" typeface="Microsoft JhengHei"/>
+        <a:font script="Java" typeface="Javanese Text"/>
+        <a:font script="Lisu" typeface="Segoe UI"/>
+        <a:font script="Mymr" typeface="Myanmar Text"/>
+        <a:font script="Nkoo" typeface="Ebrima"/>
+        <a:font script="Olck" typeface="Nirmala UI"/>
+        <a:font script="Osma" typeface="Ebrima"/>
+        <a:font script="Phag" typeface="Phagspa"/>
+        <a:font script="Syrn" typeface="Estrangelo Edessa"/>
+        <a:font script="Syrj" typeface="Estrangelo Edessa"/>
+        <a:font script="Syre" typeface="Estrangelo Edessa"/>
+        <a:font script="Sora" typeface="Nirmala UI"/>
+        <a:font script="Tale" typeface="Microsoft Tai Le"/>
+        <a:font script="Talu" typeface="Microsoft New Tai Lue"/>
+        <a:font script="Tfng" typeface="Ebrima"/>
+      </a:minorFont>
+    </a:fontScheme>
+    <a:fmtScheme name="Office">
+      <a:fillStyleLst>
+        <a:solidFill>
+          <a:schemeClr val="phClr"/>
+        </a:solidFill>
+        <a:gradFill rotWithShape="1">
+          <a:gsLst>
+            <a:gs pos="0">
+              <a:schemeClr val="phClr">
+                <a:lumMod val="110000"/>
+                <a:satMod val="105000"/>
+                <a:tint val="67000"/>
+              </a:schemeClr>
+            </a:gs>
+            <a:gs pos="50000">
+              <a:schemeClr val="phClr">
+                <a:lumMod val="105000"/>
+                <a:satMod val="103000"/>
+                <a:tint val="73000"/>
+              </a:schemeClr>
+            </a:gs>
+            <a:gs pos="100000">
+              <a:schemeClr val="phClr">
+                <a:lumMod val="105000"/>
+                <a:satMod val="109000"/>
+                <a:tint val="81000"/>
+              </a:schemeClr>
+            </a:gs>
+          </a:gsLst>
+          <a:lin ang="5400000" scaled="0"/>
+        </a:gradFill>
+        <a:gradFill rotWithShape="1">
+          <a:gsLst>
+            <a:gs pos="0">
+              <a:schemeClr val="phClr">
+                <a:satMod val="103000"/>
+                <a:lumMod val="102000"/>
+                <a:tint val="94000"/>
+              </a:schemeClr>
+            </a:gs>
+            <a:gs pos="50000">
+              <a:schemeClr val="phClr">
+                <a:satMod val="110000"/>
+                <a:lumMod val="100000"/>
+                <a:shade val="100000"/>
+              </a:schemeClr>
+            </a:gs>
+            <a:gs pos="100000">
+              <a:schemeClr val="phClr">
+                <a:lumMod val="99000"/>
+                <a:satMod val="120000"/>
+                <a:shade val="78000"/>
+              </a:schemeClr>
+            </a:gs>
+          </a:gsLst>
+          <a:lin ang="5400000" scaled="0"/>
+        </a:gradFill>
+      </a:fillStyleLst>
+      <a:lnStyleLst>
+        <a:ln w="6350" cap="flat" cmpd="sng" algn="ctr">
+          <a:solidFill>
+            <a:schemeClr val="phClr"/>
+          </a:solidFill>
+          <a:prstDash val="solid"/>
+          <a:miter lim="800000"/>
+        </a:ln>
+        <a:ln w="12700" cap="flat" cmpd="sng" algn="ctr">
+          <a:solidFill>
+            <a:schemeClr val="phClr"/>
+          </a:solidFill>
+          <a:prstDash val="solid"/>
+          <a:miter lim="800000"/>
+        </a:ln>
+        <a:ln w="19050" cap="flat" cmpd="sng" algn="ctr">
+          <a:solidFill>
+            <a:schemeClr val="phClr"/>
+          </a:solidFill>
+          <a:prstDash val="solid"/>
+          <a:miter lim="800000"/>
+        </a:ln>
+      </a:lnStyleLst>
+      <a:effectStyleLst>
+        <a:effectStyle>
+          <a:effectLst/>
+        </a:effectStyle>
+        <a:effectStyle>
+          <a:effectLst/>
+        </a:effectStyle>
+        <a:effectStyle>
+          <a:effectLst>
+            <a:outerShdw blurRad="57150" dist="19050" dir="5400000" algn="ctr" rotWithShape="0">
+              <a:srgbClr val="000000">
+                <a:alpha val="63000"/>
+              </a:srgbClr>
+            </a:outerShdw>
+          </a:effectLst>
+        </a:effectStyle>
+      </a:effectStyleLst>
+      <a:bgFillStyleLst>
+        <a:solidFill>
+          <a:schemeClr val="phClr"/>
+        </a:solidFill>
+        <a:solidFill>
+          <a:schemeClr val="phClr">
+            <a:tint val="95000"/>
+            <a:satMod val="170000"/>
+          </a:schemeClr>
+        </a:solidFill>
+        <a:gradFill rotWithShape="1">
+          <a:gsLst>
+            <a:gs pos="0">
+              <a:schemeClr val="phClr">
+                <a:tint val="93000"/>
+                <a:satMod val="150000"/>
+                <a:shade val="98000"/>
+                <a:lumMod val="102000"/>
+              </a:schemeClr>
+            </a:gs>
+            <a:gs pos="50000">
+              <a:schemeClr val="phClr">
+                <a:tint val="98000"/>
+                <a:satMod val="130000"/>
+                <a:shade val="90000"/>
+                <a:lumMod val="103000"/>
+              </a:schemeClr>
+            </a:gs>
+            <a:gs pos="100000">
+              <a:schemeClr val="phClr">
+                <a:shade val="63000"/>
+                <a:satMod val="120000"/>
+              </a:schemeClr>
+            </a:gs>
+          </a:gsLst>
+          <a:lin ang="5400000" scaled="0"/>
+        </a:gradFill>
+      </a:bgFillStyleLst>
+    </a:fmtScheme>
+  </a:themeElements>
+  <a:objectDefaults/>
+  <a:extraClrSchemeLst/>
+  <a:extLst>
+    <a:ext uri="{05A4C25C-085E-4340-85A3-A5531E510DB2}">
+      <thm15:themeFamily xmlns:thm15="http://schemas.microsoft.com/office/thememl/2012/main" name="Office Theme" id="{62F939B6-93AF-4DB8-9C6B-D6C7DFDC589F}" vid="{4A3C46E8-61CC-4603-A589-7422A47A8E4A}"/>
+    </a:ext>
+  </a:extLst>
+</a:theme>
 </file>